--- a/問題集/問21-25.pptx
+++ b/問題集/問21-25.pptx
@@ -119,6 +119,113 @@
 
 <file path=ppt/changesInfos/changesInfo1.xml><?xml version="1.0" encoding="utf-8"?>
 <pc:chgInfo xmlns:a="http://schemas.openxmlformats.org/drawingml/2006/main" xmlns:r="http://schemas.openxmlformats.org/officeDocument/2006/relationships" xmlns:ac="http://schemas.microsoft.com/office/drawing/2013/main/command" xmlns:pc="http://schemas.microsoft.com/office/powerpoint/2013/main/command">
+  <pc:docChgLst>
+    <pc:chgData name="越智 統" userId="2de33d77-a65a-42d1-92e2-b40da65bb07e" providerId="ADAL" clId="{08855A7A-197E-4962-81AE-6C5FE400DA0B}"/>
+    <pc:docChg chg="custSel modSld">
+      <pc:chgData name="越智 統" userId="2de33d77-a65a-42d1-92e2-b40da65bb07e" providerId="ADAL" clId="{08855A7A-197E-4962-81AE-6C5FE400DA0B}" dt="2026-10-15T02:49:09.869" v="181" actId="20577"/>
+      <pc:docMkLst>
+        <pc:docMk/>
+      </pc:docMkLst>
+      <pc:sldChg chg="delSp modSp mod">
+        <pc:chgData name="越智 統" userId="2de33d77-a65a-42d1-92e2-b40da65bb07e" providerId="ADAL" clId="{08855A7A-197E-4962-81AE-6C5FE400DA0B}" dt="2026-10-15T02:35:49.164" v="9" actId="478"/>
+        <pc:sldMkLst>
+          <pc:docMk/>
+          <pc:sldMk cId="1203459450" sldId="256"/>
+        </pc:sldMkLst>
+        <pc:spChg chg="mod">
+          <ac:chgData name="越智 統" userId="2de33d77-a65a-42d1-92e2-b40da65bb07e" providerId="ADAL" clId="{08855A7A-197E-4962-81AE-6C5FE400DA0B}" dt="2026-10-15T02:35:44.700" v="8" actId="20577"/>
+          <ac:spMkLst>
+            <pc:docMk/>
+            <pc:sldMk cId="1203459450" sldId="256"/>
+            <ac:spMk id="2" creationId="{1023C92E-1E15-D938-4AD5-B8F2771D30DC}"/>
+          </ac:spMkLst>
+        </pc:spChg>
+        <pc:spChg chg="del">
+          <ac:chgData name="越智 統" userId="2de33d77-a65a-42d1-92e2-b40da65bb07e" providerId="ADAL" clId="{08855A7A-197E-4962-81AE-6C5FE400DA0B}" dt="2026-10-15T02:35:49.164" v="9" actId="478"/>
+          <ac:spMkLst>
+            <pc:docMk/>
+            <pc:sldMk cId="1203459450" sldId="256"/>
+            <ac:spMk id="3" creationId="{89E3DE19-FAD7-4930-D1C0-A3081271DCE7}"/>
+          </ac:spMkLst>
+        </pc:spChg>
+      </pc:sldChg>
+      <pc:sldChg chg="modSp mod">
+        <pc:chgData name="越智 統" userId="2de33d77-a65a-42d1-92e2-b40da65bb07e" providerId="ADAL" clId="{08855A7A-197E-4962-81AE-6C5FE400DA0B}" dt="2026-10-15T02:37:06.738" v="44" actId="20577"/>
+        <pc:sldMkLst>
+          <pc:docMk/>
+          <pc:sldMk cId="2244841919" sldId="260"/>
+        </pc:sldMkLst>
+        <pc:spChg chg="mod">
+          <ac:chgData name="越智 統" userId="2de33d77-a65a-42d1-92e2-b40da65bb07e" providerId="ADAL" clId="{08855A7A-197E-4962-81AE-6C5FE400DA0B}" dt="2026-10-15T02:37:06.738" v="44" actId="20577"/>
+          <ac:spMkLst>
+            <pc:docMk/>
+            <pc:sldMk cId="2244841919" sldId="260"/>
+            <ac:spMk id="2" creationId="{3627334F-8272-C99B-D484-E710B1ECCE96}"/>
+          </ac:spMkLst>
+        </pc:spChg>
+      </pc:sldChg>
+      <pc:sldChg chg="modSp mod">
+        <pc:chgData name="越智 統" userId="2de33d77-a65a-42d1-92e2-b40da65bb07e" providerId="ADAL" clId="{08855A7A-197E-4962-81AE-6C5FE400DA0B}" dt="2026-10-15T02:43:50.338" v="71" actId="20577"/>
+        <pc:sldMkLst>
+          <pc:docMk/>
+          <pc:sldMk cId="564767801" sldId="261"/>
+        </pc:sldMkLst>
+        <pc:spChg chg="mod">
+          <ac:chgData name="越智 統" userId="2de33d77-a65a-42d1-92e2-b40da65bb07e" providerId="ADAL" clId="{08855A7A-197E-4962-81AE-6C5FE400DA0B}" dt="2026-10-15T02:43:50.338" v="71" actId="20577"/>
+          <ac:spMkLst>
+            <pc:docMk/>
+            <pc:sldMk cId="564767801" sldId="261"/>
+            <ac:spMk id="2" creationId="{1722D8DB-3D74-666B-6A85-95E40E86A0B7}"/>
+          </ac:spMkLst>
+        </pc:spChg>
+      </pc:sldChg>
+      <pc:sldChg chg="modSp mod">
+        <pc:chgData name="越智 統" userId="2de33d77-a65a-42d1-92e2-b40da65bb07e" providerId="ADAL" clId="{08855A7A-197E-4962-81AE-6C5FE400DA0B}" dt="2026-10-15T02:44:22.263" v="103" actId="20577"/>
+        <pc:sldMkLst>
+          <pc:docMk/>
+          <pc:sldMk cId="1942088428" sldId="262"/>
+        </pc:sldMkLst>
+        <pc:spChg chg="mod">
+          <ac:chgData name="越智 統" userId="2de33d77-a65a-42d1-92e2-b40da65bb07e" providerId="ADAL" clId="{08855A7A-197E-4962-81AE-6C5FE400DA0B}" dt="2026-10-15T02:44:22.263" v="103" actId="20577"/>
+          <ac:spMkLst>
+            <pc:docMk/>
+            <pc:sldMk cId="1942088428" sldId="262"/>
+            <ac:spMk id="2" creationId="{E1C18B80-4309-EED2-711B-C6C2AB4F8328}"/>
+          </ac:spMkLst>
+        </pc:spChg>
+      </pc:sldChg>
+      <pc:sldChg chg="modSp mod">
+        <pc:chgData name="越智 統" userId="2de33d77-a65a-42d1-92e2-b40da65bb07e" providerId="ADAL" clId="{08855A7A-197E-4962-81AE-6C5FE400DA0B}" dt="2026-10-15T02:45:43.169" v="138" actId="20577"/>
+        <pc:sldMkLst>
+          <pc:docMk/>
+          <pc:sldMk cId="3398056951" sldId="263"/>
+        </pc:sldMkLst>
+        <pc:spChg chg="mod">
+          <ac:chgData name="越智 統" userId="2de33d77-a65a-42d1-92e2-b40da65bb07e" providerId="ADAL" clId="{08855A7A-197E-4962-81AE-6C5FE400DA0B}" dt="2026-10-15T02:45:43.169" v="138" actId="20577"/>
+          <ac:spMkLst>
+            <pc:docMk/>
+            <pc:sldMk cId="3398056951" sldId="263"/>
+            <ac:spMk id="2" creationId="{05A5F8F2-C544-0DA4-5BD0-738FCFF6C024}"/>
+          </ac:spMkLst>
+        </pc:spChg>
+      </pc:sldChg>
+      <pc:sldChg chg="modSp mod">
+        <pc:chgData name="越智 統" userId="2de33d77-a65a-42d1-92e2-b40da65bb07e" providerId="ADAL" clId="{08855A7A-197E-4962-81AE-6C5FE400DA0B}" dt="2026-10-15T02:49:09.869" v="181" actId="20577"/>
+        <pc:sldMkLst>
+          <pc:docMk/>
+          <pc:sldMk cId="1360664792" sldId="264"/>
+        </pc:sldMkLst>
+        <pc:spChg chg="mod">
+          <ac:chgData name="越智 統" userId="2de33d77-a65a-42d1-92e2-b40da65bb07e" providerId="ADAL" clId="{08855A7A-197E-4962-81AE-6C5FE400DA0B}" dt="2026-10-15T02:49:09.869" v="181" actId="20577"/>
+          <ac:spMkLst>
+            <pc:docMk/>
+            <pc:sldMk cId="1360664792" sldId="264"/>
+            <ac:spMk id="2" creationId="{DD9D8520-4C02-A370-EAD6-0EDE2D7C957C}"/>
+          </ac:spMkLst>
+        </pc:spChg>
+      </pc:sldChg>
+    </pc:docChg>
+  </pc:docChgLst>
   <pc:docChgLst>
     <pc:chgData name="越智 統" userId="2de33d77-a65a-42d1-92e2-b40da65bb07e" providerId="ADAL" clId="{F6D288C3-54FB-4A42-AB3C-A9C127C5CB81}"/>
     <pc:docChg chg="custSel addSld modSld">
@@ -385,7 +492,7 @@
           <a:p>
             <a:fld id="{5F8E8DA6-574B-4AE2-AAFC-A8115DDA4DC1}" type="datetimeFigureOut">
               <a:rPr kumimoji="1" lang="ja-JP" altLang="en-US" smtClean="0"/>
-              <a:t>2026/9/18</a:t>
+              <a:t>2026/10/15</a:t>
             </a:fld>
             <a:endParaRPr kumimoji="1" lang="ja-JP" altLang="en-US"/>
           </a:p>
@@ -615,7 +722,7 @@
           <a:p>
             <a:fld id="{5F8E8DA6-574B-4AE2-AAFC-A8115DDA4DC1}" type="datetimeFigureOut">
               <a:rPr kumimoji="1" lang="ja-JP" altLang="en-US" smtClean="0"/>
-              <a:t>2026/9/18</a:t>
+              <a:t>2026/10/15</a:t>
             </a:fld>
             <a:endParaRPr kumimoji="1" lang="ja-JP" altLang="en-US"/>
           </a:p>
@@ -855,7 +962,7 @@
           <a:p>
             <a:fld id="{5F8E8DA6-574B-4AE2-AAFC-A8115DDA4DC1}" type="datetimeFigureOut">
               <a:rPr kumimoji="1" lang="ja-JP" altLang="en-US" smtClean="0"/>
-              <a:t>2026/9/18</a:t>
+              <a:t>2026/10/15</a:t>
             </a:fld>
             <a:endParaRPr kumimoji="1" lang="ja-JP" altLang="en-US"/>
           </a:p>
@@ -1085,7 +1192,7 @@
           <a:p>
             <a:fld id="{5F8E8DA6-574B-4AE2-AAFC-A8115DDA4DC1}" type="datetimeFigureOut">
               <a:rPr kumimoji="1" lang="ja-JP" altLang="en-US" smtClean="0"/>
-              <a:t>2026/9/18</a:t>
+              <a:t>2026/10/15</a:t>
             </a:fld>
             <a:endParaRPr kumimoji="1" lang="ja-JP" altLang="en-US"/>
           </a:p>
@@ -1360,7 +1467,7 @@
           <a:p>
             <a:fld id="{5F8E8DA6-574B-4AE2-AAFC-A8115DDA4DC1}" type="datetimeFigureOut">
               <a:rPr kumimoji="1" lang="ja-JP" altLang="en-US" smtClean="0"/>
-              <a:t>2026/9/18</a:t>
+              <a:t>2026/10/15</a:t>
             </a:fld>
             <a:endParaRPr kumimoji="1" lang="ja-JP" altLang="en-US"/>
           </a:p>
@@ -1689,7 +1796,7 @@
           <a:p>
             <a:fld id="{5F8E8DA6-574B-4AE2-AAFC-A8115DDA4DC1}" type="datetimeFigureOut">
               <a:rPr kumimoji="1" lang="ja-JP" altLang="en-US" smtClean="0"/>
-              <a:t>2026/9/18</a:t>
+              <a:t>2026/10/15</a:t>
             </a:fld>
             <a:endParaRPr kumimoji="1" lang="ja-JP" altLang="en-US"/>
           </a:p>
@@ -2165,7 +2272,7 @@
           <a:p>
             <a:fld id="{5F8E8DA6-574B-4AE2-AAFC-A8115DDA4DC1}" type="datetimeFigureOut">
               <a:rPr kumimoji="1" lang="ja-JP" altLang="en-US" smtClean="0"/>
-              <a:t>2026/9/18</a:t>
+              <a:t>2026/10/15</a:t>
             </a:fld>
             <a:endParaRPr kumimoji="1" lang="ja-JP" altLang="en-US"/>
           </a:p>
@@ -2306,7 +2413,7 @@
           <a:p>
             <a:fld id="{5F8E8DA6-574B-4AE2-AAFC-A8115DDA4DC1}" type="datetimeFigureOut">
               <a:rPr kumimoji="1" lang="ja-JP" altLang="en-US" smtClean="0"/>
-              <a:t>2026/9/18</a:t>
+              <a:t>2026/10/15</a:t>
             </a:fld>
             <a:endParaRPr kumimoji="1" lang="ja-JP" altLang="en-US"/>
           </a:p>
@@ -2419,7 +2526,7 @@
           <a:p>
             <a:fld id="{5F8E8DA6-574B-4AE2-AAFC-A8115DDA4DC1}" type="datetimeFigureOut">
               <a:rPr kumimoji="1" lang="ja-JP" altLang="en-US" smtClean="0"/>
-              <a:t>2026/9/18</a:t>
+              <a:t>2026/10/15</a:t>
             </a:fld>
             <a:endParaRPr kumimoji="1" lang="ja-JP" altLang="en-US"/>
           </a:p>
@@ -2762,7 +2869,7 @@
           <a:p>
             <a:fld id="{5F8E8DA6-574B-4AE2-AAFC-A8115DDA4DC1}" type="datetimeFigureOut">
               <a:rPr kumimoji="1" lang="ja-JP" altLang="en-US" smtClean="0"/>
-              <a:t>2026/9/18</a:t>
+              <a:t>2026/10/15</a:t>
             </a:fld>
             <a:endParaRPr kumimoji="1" lang="ja-JP" altLang="en-US"/>
           </a:p>
@@ -3050,7 +3157,7 @@
           <a:p>
             <a:fld id="{5F8E8DA6-574B-4AE2-AAFC-A8115DDA4DC1}" type="datetimeFigureOut">
               <a:rPr kumimoji="1" lang="ja-JP" altLang="en-US" smtClean="0"/>
-              <a:t>2026/9/18</a:t>
+              <a:t>2026/10/15</a:t>
             </a:fld>
             <a:endParaRPr kumimoji="1" lang="ja-JP" altLang="en-US"/>
           </a:p>
@@ -3323,7 +3430,7 @@
           <a:p>
             <a:fld id="{5F8E8DA6-574B-4AE2-AAFC-A8115DDA4DC1}" type="datetimeFigureOut">
               <a:rPr kumimoji="1" lang="ja-JP" altLang="en-US" smtClean="0"/>
-              <a:t>2026/9/18</a:t>
+              <a:t>2026/10/15</a:t>
             </a:fld>
             <a:endParaRPr kumimoji="1" lang="ja-JP" altLang="en-US"/>
           </a:p>
@@ -3761,32 +3868,11 @@
           <a:bodyPr/>
           <a:lstStyle/>
           <a:p>
-            <a:endParaRPr kumimoji="1" lang="ja-JP" altLang="en-US"/>
-          </a:p>
-        </p:txBody>
-      </p:sp>
-      <p:sp>
-        <p:nvSpPr>
-          <p:cNvPr id="3" name="字幕 2">
-            <a:extLst>
-              <a:ext uri="{FF2B5EF4-FFF2-40B4-BE49-F238E27FC236}">
-                <a16:creationId xmlns:a16="http://schemas.microsoft.com/office/drawing/2014/main" id="{89E3DE19-FAD7-4930-D1C0-A3081271DCE7}"/>
-              </a:ext>
-            </a:extLst>
-          </p:cNvPr>
-          <p:cNvSpPr>
-            <a:spLocks noGrp="1"/>
-          </p:cNvSpPr>
-          <p:nvPr>
-            <p:ph type="subTitle" idx="1"/>
-          </p:nvPr>
-        </p:nvSpPr>
-        <p:spPr/>
-        <p:txBody>
-          <a:bodyPr/>
-          <a:lstStyle/>
-          <a:p>
-            <a:endParaRPr kumimoji="1" lang="ja-JP" altLang="en-US"/>
+            <a:r>
+              <a:rPr kumimoji="1" lang="en-US" altLang="ja-JP" dirty="0"/>
+              <a:t>21-25</a:t>
+            </a:r>
+            <a:endParaRPr kumimoji="1" lang="ja-JP" altLang="en-US" dirty="0"/>
           </a:p>
         </p:txBody>
       </p:sp>
@@ -3842,8 +3928,16 @@
           <a:lstStyle/>
           <a:p>
             <a:r>
+              <a:rPr kumimoji="1" lang="ja-JP" altLang="en-US" dirty="0"/>
+              <a:t>問</a:t>
+            </a:r>
+            <a:r>
               <a:rPr kumimoji="1" lang="en-US" altLang="ja-JP" dirty="0"/>
-              <a:t>21</a:t>
+              <a:t>21: </a:t>
+            </a:r>
+            <a:r>
+              <a:rPr lang="ja-JP" altLang="en-US" dirty="0"/>
+              <a:t>文字の回転</a:t>
             </a:r>
             <a:endParaRPr kumimoji="1" lang="ja-JP" altLang="en-US" dirty="0"/>
           </a:p>
@@ -4077,10 +4171,17 @@
           <a:lstStyle/>
           <a:p>
             <a:r>
+              <a:rPr kumimoji="1" lang="ja-JP" altLang="en-US" dirty="0"/>
+              <a:t>問</a:t>
+            </a:r>
+            <a:r>
               <a:rPr kumimoji="1" lang="en-US" altLang="ja-JP" dirty="0"/>
-              <a:t>22</a:t>
-            </a:r>
-            <a:endParaRPr kumimoji="1" lang="ja-JP" altLang="en-US" dirty="0"/>
+              <a:t>22: </a:t>
+            </a:r>
+            <a:r>
+              <a:rPr kumimoji="1" lang="ja-JP" altLang="en-US" dirty="0"/>
+              <a:t>整数と文字列</a:t>
+            </a:r>
           </a:p>
         </p:txBody>
       </p:sp>
@@ -4316,10 +4417,17 @@
           <a:lstStyle/>
           <a:p>
             <a:r>
+              <a:rPr kumimoji="1" lang="ja-JP" altLang="en-US" dirty="0"/>
+              <a:t>問</a:t>
+            </a:r>
+            <a:r>
               <a:rPr kumimoji="1" lang="en-US" altLang="ja-JP" dirty="0"/>
-              <a:t>23</a:t>
-            </a:r>
-            <a:endParaRPr kumimoji="1" lang="ja-JP" altLang="en-US" dirty="0"/>
+              <a:t>23: </a:t>
+            </a:r>
+            <a:r>
+              <a:rPr kumimoji="1" lang="ja-JP" altLang="en-US" dirty="0"/>
+              <a:t>回文</a:t>
+            </a:r>
           </a:p>
         </p:txBody>
       </p:sp>
@@ -4505,10 +4613,17 @@
           <a:lstStyle/>
           <a:p>
             <a:r>
+              <a:rPr kumimoji="1" lang="ja-JP" altLang="en-US" dirty="0"/>
+              <a:t>問</a:t>
+            </a:r>
+            <a:r>
               <a:rPr kumimoji="1" lang="en-US" altLang="ja-JP" dirty="0"/>
-              <a:t>24</a:t>
-            </a:r>
-            <a:endParaRPr kumimoji="1" lang="ja-JP" altLang="en-US" dirty="0"/>
+              <a:t>24: </a:t>
+            </a:r>
+            <a:r>
+              <a:rPr kumimoji="1" lang="ja-JP" altLang="en-US" dirty="0"/>
+              <a:t>特殊な二次元配列</a:t>
+            </a:r>
           </a:p>
         </p:txBody>
       </p:sp>
@@ -4714,8 +4829,32 @@
           <a:lstStyle/>
           <a:p>
             <a:r>
+              <a:rPr kumimoji="1" lang="ja-JP" altLang="en-US" dirty="0"/>
+              <a:t>問</a:t>
+            </a:r>
+            <a:r>
               <a:rPr kumimoji="1" lang="en-US" altLang="ja-JP" dirty="0"/>
-              <a:t>25</a:t>
+              <a:t>25: </a:t>
+            </a:r>
+            <a:r>
+              <a:rPr kumimoji="1" lang="ja-JP" altLang="en-US" dirty="0"/>
+              <a:t>オブジェクト</a:t>
+            </a:r>
+            <a:r>
+              <a:rPr kumimoji="1" lang="en-US" altLang="ja-JP" dirty="0"/>
+              <a:t>(</a:t>
+            </a:r>
+            <a:r>
+              <a:rPr kumimoji="1" lang="ja-JP" altLang="en-US" dirty="0"/>
+              <a:t>構造体</a:t>
+            </a:r>
+            <a:r>
+              <a:rPr kumimoji="1" lang="en-US" altLang="ja-JP" dirty="0"/>
+              <a:t>)</a:t>
+            </a:r>
+            <a:r>
+              <a:rPr kumimoji="1" lang="ja-JP" altLang="en-US"/>
+              <a:t>の配列</a:t>
             </a:r>
             <a:endParaRPr kumimoji="1" lang="ja-JP" altLang="en-US" dirty="0"/>
           </a:p>
